--- a/slides/costing.pptx
+++ b/slides/costing.pptx
@@ -1288,7 +1288,7 @@
           <a:lstStyle/>
           <a:p>
             <a:r>
-              <a:t>Block 3A later names these three steps again in the context of framing. Here we practise them. The commonest omissions: capital, shared overheads, and the time of staff who are "already paid for".</a:t>
+              <a:t>Session 3 named these three steps while framing the question. Here we practise them on a service in this room, which is where they stop being abstract. The commonest omissions: capital, shared overheads, and the time of staff who are "already paid for".</a:t>
             </a:r>
           </a:p>
         </p:txBody>
@@ -1358,7 +1358,7 @@
           <a:lstStyle/>
           <a:p>
             <a:r>
-              <a:t>This is opportunity cost from Block 1 arriving at ward level. The nurse spending 45 minutes on the new procedure is not spending them somewhere else. That is the cost.</a:t>
+              <a:t>This is opportunity cost from Session 2 arriving at ward level. The nurse spending 45 minutes on the new procedure is not spending them somewhere else. That is the cost.</a:t>
             </a:r>
           </a:p>
         </p:txBody>
